--- a/decks/maths-directed/maths-directed_ch6_order-of-operations.pptx
+++ b/decks/maths-directed/maths-directed_ch6_order-of-operations.pptx
@@ -121,47 +121,47 @@
   <p:extLst>
     <p:ext uri="{521415D9-36F7-43E2-AB2F-B90AF26B5E84}">
       <p14:sectionLst xmlns:p14="http://schemas.microsoft.com/office/powerpoint/2010/main">
-        <p14:section name="Opening" id="{daf400d0-5b6f-7064-de75-e4c9840cda08}">
+        <p14:section name="Opening" id="{0358bf81-d5b8-4156-a7d8-dfe835ad4cb9}">
           <p14:sldIdLst>
             <p14:sldId id="256"/>
           </p14:sldIdLst>
         </p14:section>
-        <p14:section name="Gate" id="{b50b83b0-679c-bcf9-9675-7d861d7fcd58}">
+        <p14:section name="Gate" id="{4dd6736e-cfd1-ff40-fdc8-132cfad33b77}">
           <p14:sldIdLst>
             <p14:sldId id="257"/>
             <p14:sldId id="258"/>
           </p14:sldIdLst>
         </p14:section>
-        <p14:section name="Pre-teach" id="{cf9d253d-44ca-1dd7-7aa5-425c42fc220a}">
+        <p14:section name="Pre-teach" id="{2beb084e-3e3a-b433-55bd-c52ea7beb39e}">
           <p14:sldIdLst>
             <p14:sldId id="259"/>
           </p14:sldIdLst>
         </p14:section>
-        <p14:section name="Read-along" id="{a7cb10b7-d8b9-423f-93bf-36439f94f8f1}">
+        <p14:section name="Read-along" id="{884a5262-205a-1f73-9565-ddb886431c1d}">
           <p14:sldIdLst>
             <p14:sldId id="260"/>
             <p14:sldId id="261"/>
           </p14:sldIdLst>
         </p14:section>
-        <p14:section name="Teach" id="{1c3b55a7-9c65-662d-b8d6-8bd6b9b0124b}">
+        <p14:section name="Teach" id="{411a1ba1-598e-d025-db69-f27420971748}">
           <p14:sldIdLst>
             <p14:sldId id="262"/>
             <p14:sldId id="263"/>
             <p14:sldId id="264"/>
           </p14:sldIdLst>
         </p14:section>
-        <p14:section name="Routes" id="{0e85c297-3b4c-9dc3-b764-b076e8740c05}">
+        <p14:section name="Routes" id="{169a12c2-be51-87cd-a6cd-2c61afd150c4}">
           <p14:sldIdLst>
             <p14:sldId id="265"/>
             <p14:sldId id="266"/>
           </p14:sldIdLst>
         </p14:section>
-        <p14:section name="Close" id="{5a601052-5eac-36c0-8672-ff782539ef31}">
+        <p14:section name="Close" id="{e1b8ed31-b46d-e065-62d6-b834c14fb2c0}">
           <p14:sldIdLst>
             <p14:sldId id="267"/>
           </p14:sldIdLst>
         </p14:section>
-        <p14:section name="Answers" id="{5493b01d-8087-b9a3-317f-543c82448652}">
+        <p14:section name="Answers" id="{d2f905a9-4bdb-37cf-3891-3f6fa94e700e}">
           <p14:sldIdLst>
             <p14:sldId id="268"/>
             <p14:sldId id="269"/>
@@ -3833,35 +3833,35 @@
                 <a:ea typeface="Calibri" pitchFamily="34" charset="-122"/>
                 <a:cs typeface="Calibri" pitchFamily="34" charset="-120"/>
               </a:rPr>
+              <a:t>0      </a:t>
+            </a:r>
+            <a:pPr algn="ctr" indent="0" marL="0">
+              <a:buNone/>
+            </a:pPr>
+            <a:r>
+              <a:rPr lang="en-US" sz="1800" b="1" dirty="0">
+                <a:solidFill>
+                  <a:srgbClr val="B8862B"/>
+                </a:solidFill>
+                <a:latin typeface="Calibri" pitchFamily="34" charset="0"/>
+                <a:ea typeface="Calibri" pitchFamily="34" charset="-122"/>
+                <a:cs typeface="Calibri" pitchFamily="34" charset="-120"/>
+              </a:rPr>
+              <a:t>B  </a:t>
+            </a:r>
+            <a:pPr algn="ctr" indent="0" marL="0">
+              <a:buNone/>
+            </a:pPr>
+            <a:r>
+              <a:rPr lang="en-US" sz="1800" dirty="0">
+                <a:solidFill>
+                  <a:srgbClr val="1E2229"/>
+                </a:solidFill>
+                <a:latin typeface="Calibri" pitchFamily="34" charset="0"/>
+                <a:ea typeface="Calibri" pitchFamily="34" charset="-122"/>
+                <a:cs typeface="Calibri" pitchFamily="34" charset="-120"/>
+              </a:rPr>
               <a:t>−36      </a:t>
-            </a:r>
-            <a:pPr algn="ctr" indent="0" marL="0">
-              <a:buNone/>
-            </a:pPr>
-            <a:r>
-              <a:rPr lang="en-US" sz="1800" b="1" dirty="0">
-                <a:solidFill>
-                  <a:srgbClr val="B8862B"/>
-                </a:solidFill>
-                <a:latin typeface="Calibri" pitchFamily="34" charset="0"/>
-                <a:ea typeface="Calibri" pitchFamily="34" charset="-122"/>
-                <a:cs typeface="Calibri" pitchFamily="34" charset="-120"/>
-              </a:rPr>
-              <a:t>B  </a:t>
-            </a:r>
-            <a:pPr algn="ctr" indent="0" marL="0">
-              <a:buNone/>
-            </a:pPr>
-            <a:r>
-              <a:rPr lang="en-US" sz="1800" dirty="0">
-                <a:solidFill>
-                  <a:srgbClr val="1E2229"/>
-                </a:solidFill>
-                <a:latin typeface="Calibri" pitchFamily="34" charset="0"/>
-                <a:ea typeface="Calibri" pitchFamily="34" charset="-122"/>
-                <a:cs typeface="Calibri" pitchFamily="34" charset="-120"/>
-              </a:rPr>
-              <a:t>0      </a:t>
             </a:r>
             <a:pPr algn="ctr" indent="0" marL="0">
               <a:buNone/>
@@ -7947,7 +7947,7 @@
                 <a:ea typeface="Calibri" pitchFamily="34" charset="-122"/>
                 <a:cs typeface="Calibri" pitchFamily="34" charset="-120"/>
               </a:rPr>
-              <a:t>the addition 5 + 6</a:t>
+              <a:t>the addition 5 + (−2)</a:t>
             </a:r>
             <a:endParaRPr lang="en-US" sz="2400" dirty="0"/>
           </a:p>
@@ -8021,7 +8021,7 @@
                 <a:ea typeface="Calibri" pitchFamily="34" charset="-122"/>
                 <a:cs typeface="Calibri" pitchFamily="34" charset="-120"/>
               </a:rPr>
-              <a:t>the addition 5 + (−2)</a:t>
+              <a:t>the addition 5 + 6</a:t>
             </a:r>
             <a:endParaRPr lang="en-US" sz="2400" dirty="0"/>
           </a:p>

--- a/decks/maths-directed/maths-directed_ch6_order-of-operations.pptx
+++ b/decks/maths-directed/maths-directed_ch6_order-of-operations.pptx
@@ -121,47 +121,47 @@
   <p:extLst>
     <p:ext uri="{521415D9-36F7-43E2-AB2F-B90AF26B5E84}">
       <p14:sectionLst xmlns:p14="http://schemas.microsoft.com/office/powerpoint/2010/main">
-        <p14:section name="Opening" id="{0358bf81-d5b8-4156-a7d8-dfe835ad4cb9}">
+        <p14:section name="Opening" id="{93ff145f-8180-19ab-b179-263e9da99521}">
           <p14:sldIdLst>
             <p14:sldId id="256"/>
           </p14:sldIdLst>
         </p14:section>
-        <p14:section name="Gate" id="{4dd6736e-cfd1-ff40-fdc8-132cfad33b77}">
+        <p14:section name="Gate" id="{b863bf4f-6a10-d869-554f-d0e3e0fb597d}">
           <p14:sldIdLst>
             <p14:sldId id="257"/>
             <p14:sldId id="258"/>
           </p14:sldIdLst>
         </p14:section>
-        <p14:section name="Pre-teach" id="{2beb084e-3e3a-b433-55bd-c52ea7beb39e}">
+        <p14:section name="Pre-teach" id="{c6321b88-fecc-5811-e569-1a245a9cb87d}">
           <p14:sldIdLst>
             <p14:sldId id="259"/>
           </p14:sldIdLst>
         </p14:section>
-        <p14:section name="Read-along" id="{884a5262-205a-1f73-9565-ddb886431c1d}">
+        <p14:section name="Read-along" id="{94e08af5-df04-4f0c-1640-7c96b4677655}">
           <p14:sldIdLst>
             <p14:sldId id="260"/>
             <p14:sldId id="261"/>
           </p14:sldIdLst>
         </p14:section>
-        <p14:section name="Teach" id="{411a1ba1-598e-d025-db69-f27420971748}">
+        <p14:section name="Teach" id="{5b3fe4ec-cf6b-cc1b-07ed-016bacd1fff5}">
           <p14:sldIdLst>
             <p14:sldId id="262"/>
             <p14:sldId id="263"/>
             <p14:sldId id="264"/>
           </p14:sldIdLst>
         </p14:section>
-        <p14:section name="Routes" id="{169a12c2-be51-87cd-a6cd-2c61afd150c4}">
+        <p14:section name="Routes" id="{9bb1a063-c98e-134b-d8db-04f9c6c47c20}">
           <p14:sldIdLst>
             <p14:sldId id="265"/>
             <p14:sldId id="266"/>
           </p14:sldIdLst>
         </p14:section>
-        <p14:section name="Close" id="{e1b8ed31-b46d-e065-62d6-b834c14fb2c0}">
+        <p14:section name="Close" id="{64cd676e-bee7-1af9-b0d4-7902c3702eb6}">
           <p14:sldIdLst>
             <p14:sldId id="267"/>
           </p14:sldIdLst>
         </p14:section>
-        <p14:section name="Answers" id="{d2f905a9-4bdb-37cf-3891-3f6fa94e700e}">
+        <p14:section name="Answers" id="{ee7e2513-0687-8b40-19fa-73a452bb4163}">
           <p14:sldIdLst>
             <p14:sldId id="268"/>
             <p14:sldId id="269"/>
